--- a/decks/hist-vikings-saxons/hist-vikings-saxons_ch3_who-were-the-vikings.pptx
+++ b/decks/hist-vikings-saxons/hist-vikings-saxons_ch3_who-were-the-vikings.pptx
@@ -126,30 +126,30 @@
   <p:extLst>
     <p:ext uri="{521415D9-36F7-43E2-AB2F-B90AF26B5E84}">
       <p14:sectionLst xmlns:p14="http://schemas.microsoft.com/office/powerpoint/2010/main">
-        <p14:section name="Opening" id="{3b07fc87-8d8a-092d-d365-fd2e20660b3b}">
+        <p14:section name="Opening" id="{92a22d5a-646e-a039-b3dd-93b6d1adee7c}">
           <p14:sldIdLst>
             <p14:sldId id="256"/>
           </p14:sldIdLst>
         </p14:section>
-        <p14:section name="Gate" id="{1aca9163-294d-8926-1bcf-b4bb524fb599}">
+        <p14:section name="Gate" id="{39aeaa7e-9f8b-dc40-0dc9-c8cd7abec510}">
           <p14:sldIdLst>
             <p14:sldId id="257"/>
             <p14:sldId id="258"/>
           </p14:sldIdLst>
         </p14:section>
-        <p14:section name="Pre-teach" id="{641cc68f-1389-fc21-7426-8c5d4a2fd93b}">
+        <p14:section name="Pre-teach" id="{34e9a88e-36a8-d076-9d9b-68efe2a1bfc7}">
           <p14:sldIdLst>
             <p14:sldId id="259"/>
             <p14:sldId id="260"/>
           </p14:sldIdLst>
         </p14:section>
-        <p14:section name="Read-along" id="{b820ea41-2d40-6edf-f185-25f1d8aceed8}">
+        <p14:section name="Read-along" id="{d762babf-347b-b395-6e9d-fac367f53d7d}">
           <p14:sldIdLst>
             <p14:sldId id="261"/>
             <p14:sldId id="262"/>
           </p14:sldIdLst>
         </p14:section>
-        <p14:section name="Teach" id="{5b7a6d8a-15db-4e02-489b-fcfc233c0c50}">
+        <p14:section name="Teach" id="{616c2653-e265-0d3b-94fe-ede1c987962e}">
           <p14:sldIdLst>
             <p14:sldId id="263"/>
             <p14:sldId id="264"/>
@@ -158,7 +158,7 @@
             <p14:sldId id="267"/>
           </p14:sldIdLst>
         </p14:section>
-        <p14:section name="Routes" id="{74d133bd-c45f-66b5-dde4-bf51d49e037b}">
+        <p14:section name="Routes" id="{25f0dc5c-8f09-4bc8-43e2-57936480615a}">
           <p14:sldIdLst>
             <p14:sldId id="268"/>
             <p14:sldId id="269"/>
@@ -166,12 +166,12 @@
             <p14:sldId id="271"/>
           </p14:sldIdLst>
         </p14:section>
-        <p14:section name="Close" id="{c357450d-8063-8fc4-13f4-23768a1bca72}">
+        <p14:section name="Close" id="{ba5ac91b-cd66-1dc7-6acf-47808e2d9384}">
           <p14:sldIdLst>
             <p14:sldId id="272"/>
           </p14:sldIdLst>
         </p14:section>
-        <p14:section name="Answers" id="{da2eb878-e80b-9a29-aee3-285c61d59660}">
+        <p14:section name="Answers" id="{cedfebf3-a888-0a6b-93dd-1946e9173993}">
           <p14:sldIdLst>
             <p14:sldId id="273"/>
             <p14:sldId id="274"/>
@@ -859,8 +859,8 @@
               <a:rPr lang="en-US" dirty="0"/>
               <a:t>Teach — What a bead can tell us. Say it in your own words, then check understanding with a quick question: ask a pupil from the pre-teach group first, since they met these words and ideas before the lesson. Pupils try to recall before you re-explain.
 At Repton, in Derbyshire, archaeologists have found a Viking camp built around a monastery, with a mass grave holding 264 bodies dated to the 870s, silver Arab coins dated to between 872 and 874, gaming pieces, axe heads, ship's nails and a Thor pendant. Among the finds was a carnelian bead: a small, shiny red stone bead that Vikings sometimes wore as jewellery.
-The interesting part is that carnelian did not come from Scandinavia at all. This bead came from Gujarat, in India. It had travelled thousands of miles, passing through many traders in the Islamic world, the Byzantine Empire and eastern Europe before it reached a Viking in England. The same kind of bead has been found at a Viking fort at Vypovzyv, in Ukraine. At Birka in Sweden a woman was buried with carnelian beads and a ring with Arabic writing. At Gotland a hoard held 14,295 coins, most of them Islamic.
-This shows that the Vikings were not just fierce warriors who raided other countries. They were also skilled traders who used long routes along the rivers of Russia and towards Constantinople. They swapped furs, amber and even enslaved people for luxury items such as beads, silk and silver coins. By finding out where a bead came from and where it ended up, archaeologists can map Viking journeys as far as Asia, the Middle East and North Africa.
+The interesting part is that carnelian did not come from Scandinavia at all. This bead came from Gujarat, in India. It had crossed thousands of miles to get here. Trader after trader had handled it, first in the Islamic world, then the Byzantine Empire, then eastern Europe, until at last it ended up with a Viking in England. The same kind of bead has been found at a Viking fort at Vypovzyv, in Ukraine. At Birka in Sweden a woman was buried with carnelian beads and a ring with Arabic writing. At Gotland a hoard held 14,295 coins, most of them Islamic.
+This shows that the Vikings were not just fierce warriors who raided other countries. They were also skilled traders who used long routes along the rivers of Russia and towards Constantinople. They swapped furs, amber and even enslaved people for luxury items such as beads, silk and silver coins. Work out where a bead was made, work out where it was finally buried, and you have two fixed points on a trade route. That is how archaeologists have traced Viking journeys as far as Asia, the Middle East and North Africa.
 Tip: One small object, three big inferences: the Vikings traded, they travelled far, and they met people from many cultures.</a:t>
             </a:r>
             <a:endParaRPr lang="en-US" dirty="0"/>
@@ -2350,7 +2350,7 @@
               <a:rPr lang="en-US" dirty="0"/>
               <a:t>Teach — Gods, Valhalla and the Thing. Say it in your own words, then check understanding with a quick question: ask a pupil from the pre-teach group first, since they met these words and ideas before the lesson. Pupils try to recall before you re-explain.
 Your lesson names twelve gods in the Viking religion, each responsible for different things. Odin was the king of the gods. Thor was the god of thunder and fertility, usually shown with his hammer, Mjolnir. Loki was the god of mischief and chaos, often represented by a snake. Heimdall was the god of light and protection, who kept watch for invaders of Asgard, the home of the gods.
-It was extremely important to Vikings that they reached Valhalla, their version of heaven, where they would live with Odin. This belief helps explain why Viking warriors were willing to take such risks: a brave death was a way in.
+Reaching Valhalla mattered enormously. Vikings believed it was a kind of heaven: a great hall where the bravest of the dead lived alongside the god Odin. Hold that belief, and the risks a Viking warrior took start to make sense, because a brave death was the way in.
 The Thing was the Viking version of a modern parliament. At the Thing, Vikings decided what the laws should be and discussed politics. Families could settle arguments there through debate, although sometimes the argument ended in a fight. The Thing lasted several days and had a festival atmosphere, with people drinking and setting up stalls to sell what they had made.
 Tip: Odin rules, Thor thunders with his hammer, Loki causes mischief, Heimdall keeps watch. Four gods, four jobs.</a:t>
             </a:r>
@@ -18492,7 +18492,7 @@
               <a:buNone/>
             </a:pPr>
             <a:r>
-              <a:rPr lang="en-US" sz="2400" dirty="0">
+              <a:rPr lang="en-US" sz="2200" dirty="0">
                 <a:solidFill>
                   <a:srgbClr val="1E2229"/>
                 </a:solidFill>
@@ -18502,7 +18502,7 @@
               </a:rPr>
               <a:t>Your lesson names twelve gods in the Viking religion, each responsible for different things.</a:t>
             </a:r>
-            <a:endParaRPr lang="en-US" sz="2400" dirty="0"/>
+            <a:endParaRPr lang="en-US" sz="2200" dirty="0"/>
           </a:p>
         </p:txBody>
       </p:sp>
@@ -18612,7 +18612,7 @@
               <a:buNone/>
             </a:pPr>
             <a:r>
-              <a:rPr lang="en-US" sz="2400" dirty="0">
+              <a:rPr lang="en-US" sz="2200" dirty="0">
                 <a:solidFill>
                   <a:srgbClr val="1E2229"/>
                 </a:solidFill>
@@ -18620,9 +18620,9 @@
                 <a:ea typeface="Calibri" pitchFamily="34" charset="-122"/>
                 <a:cs typeface="Calibri" pitchFamily="34" charset="-120"/>
               </a:rPr>
-              <a:t>It was extremely important to Vikings that they reached Valhalla, their version of heaven, where they would live with Odin.</a:t>
-            </a:r>
-            <a:endParaRPr lang="en-US" sz="2400" dirty="0"/>
+              <a:t>Reaching Valhalla mattered enormously. Vikings believed it was a kind of heaven: a great hall where the bravest of the dead lived alongside the god Odin.</a:t>
+            </a:r>
+            <a:endParaRPr lang="en-US" sz="2200" dirty="0"/>
           </a:p>
         </p:txBody>
       </p:sp>
@@ -18732,7 +18732,7 @@
               <a:buNone/>
             </a:pPr>
             <a:r>
-              <a:rPr lang="en-US" sz="2400" dirty="0">
+              <a:rPr lang="en-US" sz="2200" dirty="0">
                 <a:solidFill>
                   <a:srgbClr val="1E2229"/>
                 </a:solidFill>
@@ -18742,7 +18742,7 @@
               </a:rPr>
               <a:t>The Thing was the Viking version of a modern parliament.</a:t>
             </a:r>
-            <a:endParaRPr lang="en-US" sz="2400" dirty="0"/>
+            <a:endParaRPr lang="en-US" sz="2200" dirty="0"/>
           </a:p>
         </p:txBody>
       </p:sp>
